--- a/media/resources/files/Onduktar_Koboytuu3Tutashtyr.pptx
+++ b/media/resources/files/Onduktar_Koboytuu3Tutashtyr.pptx
@@ -7370,7 +7370,7 @@
                 <a:ea typeface="+mn-ea"/>
                 <a:cs typeface="+mn-cs"/>
               </a:rPr>
-              <a:t>Ошол команда үчүн квадратты талап кылуу үчүн жооп кутучасынын тиешелүү көлөкө тарабын чыкылдатыңыз/тийиңиз.</a:t>
+              <a:t>Ошол команданын квадратын ээлөө үчүн жооп кутучасынын боёлгон бөлүгүн басыңыз.</a:t>
             </a:r>
           </a:p>
           <a:p>
@@ -8003,7 +8003,7 @@
                             <a:schemeClr val="tx1"/>
                           </a:solidFill>
                         </a:rPr>
-                        <a:t>4.5</a:t>
+                        <a:t>4,5</a:t>
                       </a:r>
                     </a:p>
                   </a:txBody>
@@ -8075,7 +8075,7 @@
                             <a:schemeClr val="tx1"/>
                           </a:solidFill>
                         </a:rPr>
-                        <a:t>3.2</a:t>
+                        <a:t>3,2</a:t>
                       </a:r>
                     </a:p>
                   </a:txBody>
@@ -8147,7 +8147,7 @@
                             <a:schemeClr val="tx1"/>
                           </a:solidFill>
                         </a:rPr>
-                        <a:t>5.1</a:t>
+                        <a:t>5,1</a:t>
                       </a:r>
                     </a:p>
                   </a:txBody>
@@ -8203,7 +8203,7 @@
                             <a:schemeClr val="tx1"/>
                           </a:solidFill>
                         </a:rPr>
-                        <a:t>1.2</a:t>
+                        <a:t>1,2</a:t>
                       </a:r>
                     </a:p>
                   </a:txBody>
@@ -8266,7 +8266,7 @@
                             <a:schemeClr val="tx1"/>
                           </a:solidFill>
                         </a:rPr>
-                        <a:t>0.08</a:t>
+                        <a:t>0,08</a:t>
                       </a:r>
                     </a:p>
                   </a:txBody>
@@ -8322,7 +8322,7 @@
                             <a:schemeClr val="tx1"/>
                           </a:solidFill>
                         </a:rPr>
-                        <a:t>5.2</a:t>
+                        <a:t>5,2</a:t>
                       </a:r>
                     </a:p>
                   </a:txBody>
@@ -8450,7 +8450,7 @@
                             <a:schemeClr val="tx1"/>
                           </a:solidFill>
                         </a:rPr>
-                        <a:t>3.6</a:t>
+                        <a:t>3,6</a:t>
                       </a:r>
                     </a:p>
                   </a:txBody>
@@ -8513,7 +8513,7 @@
                             <a:schemeClr val="tx1"/>
                           </a:solidFill>
                         </a:rPr>
-                        <a:t>12.4</a:t>
+                        <a:t>12,4</a:t>
                       </a:r>
                     </a:p>
                   </a:txBody>
@@ -8569,7 +8569,7 @@
                             <a:schemeClr val="tx1"/>
                           </a:solidFill>
                         </a:rPr>
-                        <a:t>0.2</a:t>
+                        <a:t>0,2</a:t>
                       </a:r>
                     </a:p>
                   </a:txBody>
@@ -8641,7 +8641,7 @@
                             <a:schemeClr val="tx1"/>
                           </a:solidFill>
                         </a:rPr>
-                        <a:t>6.9</a:t>
+                        <a:t>6,9</a:t>
                       </a:r>
                     </a:p>
                   </a:txBody>
@@ -8697,7 +8697,7 @@
                             <a:schemeClr val="tx1"/>
                           </a:solidFill>
                         </a:rPr>
-                        <a:t>2.8</a:t>
+                        <a:t>2,8</a:t>
                       </a:r>
                     </a:p>
                   </a:txBody>
@@ -8760,7 +8760,7 @@
                             <a:schemeClr val="tx1"/>
                           </a:solidFill>
                         </a:rPr>
-                        <a:t>5.6</a:t>
+                        <a:t>5,6</a:t>
                       </a:r>
                     </a:p>
                   </a:txBody>
@@ -8888,7 +8888,7 @@
                             <a:schemeClr val="tx1"/>
                           </a:solidFill>
                         </a:rPr>
-                        <a:t>4.8</a:t>
+                        <a:t>4,8</a:t>
                       </a:r>
                     </a:p>
                   </a:txBody>
@@ -8944,7 +8944,7 @@
                             <a:schemeClr val="tx1"/>
                           </a:solidFill>
                         </a:rPr>
-                        <a:t>11.5</a:t>
+                        <a:t>11,5</a:t>
                       </a:r>
                     </a:p>
                   </a:txBody>
@@ -9513,7 +9513,7 @@
                           <a:latin typeface="Arial" panose="020B0604020202020204" pitchFamily="34" charset="0"/>
                           <a:cs typeface="Arial" panose="020B0604020202020204" pitchFamily="34" charset="0"/>
                         </a:rPr>
-                        <a:t>3 × 2.3</a:t>
+                        <a:t>3 × 2,3</a:t>
                       </a:r>
                     </a:p>
                   </a:txBody>
@@ -9570,7 +9570,7 @@
                           <a:latin typeface="Arial" panose="020B0604020202020204" pitchFamily="34" charset="0"/>
                           <a:cs typeface="Arial" panose="020B0604020202020204" pitchFamily="34" charset="0"/>
                         </a:rPr>
-                        <a:t>0.9 × 5</a:t>
+                        <a:t>0,9 × 5</a:t>
                       </a:r>
                     </a:p>
                   </a:txBody>
@@ -9634,7 +9634,7 @@
                           <a:latin typeface="Arial" panose="020B0604020202020204" pitchFamily="34" charset="0"/>
                           <a:cs typeface="Arial" panose="020B0604020202020204" pitchFamily="34" charset="0"/>
                         </a:rPr>
-                        <a:t>3.1 × 4</a:t>
+                        <a:t>3,1 × 4</a:t>
                       </a:r>
                     </a:p>
                   </a:txBody>
@@ -9691,7 +9691,7 @@
                           <a:latin typeface="Arial" panose="020B0604020202020204" pitchFamily="34" charset="0"/>
                           <a:cs typeface="Arial" panose="020B0604020202020204" pitchFamily="34" charset="0"/>
                         </a:rPr>
-                        <a:t>5 × 2.3</a:t>
+                        <a:t>5 × 2,3</a:t>
                       </a:r>
                     </a:p>
                   </a:txBody>
@@ -9755,7 +9755,7 @@
                           <a:latin typeface="Arial" panose="020B0604020202020204" pitchFamily="34" charset="0"/>
                           <a:cs typeface="Arial" panose="020B0604020202020204" pitchFamily="34" charset="0"/>
                         </a:rPr>
-                        <a:t>0.3 × 4</a:t>
+                        <a:t>0,3 × 4</a:t>
                       </a:r>
                     </a:p>
                   </a:txBody>
@@ -9812,7 +9812,7 @@
                           <a:latin typeface="Arial" panose="020B0604020202020204" pitchFamily="34" charset="0"/>
                           <a:cs typeface="Arial" panose="020B0604020202020204" pitchFamily="34" charset="0"/>
                         </a:rPr>
-                        <a:t>1.6 × 3</a:t>
+                        <a:t>1,6 × 3</a:t>
                       </a:r>
                     </a:p>
                   </a:txBody>
@@ -9876,7 +9876,7 @@
                           <a:latin typeface="Arial" panose="020B0604020202020204" pitchFamily="34" charset="0"/>
                           <a:cs typeface="Arial" panose="020B0604020202020204" pitchFamily="34" charset="0"/>
                         </a:rPr>
-                        <a:t>6 × 0.6</a:t>
+                        <a:t>6 × 0,6</a:t>
                       </a:r>
                     </a:p>
                   </a:txBody>
@@ -9933,7 +9933,7 @@
                           <a:latin typeface="Arial" panose="020B0604020202020204" pitchFamily="34" charset="0"/>
                           <a:cs typeface="Arial" panose="020B0604020202020204" pitchFamily="34" charset="0"/>
                         </a:rPr>
-                        <a:t>0.7 × 4</a:t>
+                        <a:t>0,7 × 4</a:t>
                       </a:r>
                     </a:p>
                   </a:txBody>
@@ -9997,7 +9997,7 @@
                           <a:latin typeface="Arial" panose="020B0604020202020204" pitchFamily="34" charset="0"/>
                           <a:cs typeface="Arial" panose="020B0604020202020204" pitchFamily="34" charset="0"/>
                         </a:rPr>
-                        <a:t>1.5 × 4</a:t>
+                        <a:t>1,5 × 4</a:t>
                       </a:r>
                     </a:p>
                   </a:txBody>
@@ -10054,7 +10054,7 @@
                           <a:latin typeface="Arial" panose="020B0604020202020204" pitchFamily="34" charset="0"/>
                           <a:cs typeface="Arial" panose="020B0604020202020204" pitchFamily="34" charset="0"/>
                         </a:rPr>
-                        <a:t>4 × 1.4</a:t>
+                        <a:t>4 × 1,4</a:t>
                       </a:r>
                     </a:p>
                   </a:txBody>
@@ -10118,7 +10118,7 @@
                           <a:latin typeface="Arial" panose="020B0604020202020204" pitchFamily="34" charset="0"/>
                           <a:cs typeface="Arial" panose="020B0604020202020204" pitchFamily="34" charset="0"/>
                         </a:rPr>
-                        <a:t>2.5 × 4</a:t>
+                        <a:t>2,5 × 4</a:t>
                       </a:r>
                     </a:p>
                   </a:txBody>
@@ -10175,7 +10175,7 @@
                           <a:latin typeface="Arial" panose="020B0604020202020204" pitchFamily="34" charset="0"/>
                           <a:cs typeface="Arial" panose="020B0604020202020204" pitchFamily="34" charset="0"/>
                         </a:rPr>
-                        <a:t>0.8 × 0.1</a:t>
+                        <a:t>0,8 × 0,1</a:t>
                       </a:r>
                     </a:p>
                   </a:txBody>
@@ -10239,7 +10239,7 @@
                           <a:latin typeface="Arial" panose="020B0604020202020204" pitchFamily="34" charset="0"/>
                           <a:cs typeface="Arial" panose="020B0604020202020204" pitchFamily="34" charset="0"/>
                         </a:rPr>
-                        <a:t>0.5 × 0.4</a:t>
+                        <a:t>0,5 × 0,4</a:t>
                       </a:r>
                     </a:p>
                   </a:txBody>
@@ -10296,7 +10296,7 @@
                           <a:latin typeface="Arial" panose="020B0604020202020204" pitchFamily="34" charset="0"/>
                           <a:cs typeface="Arial" panose="020B0604020202020204" pitchFamily="34" charset="0"/>
                         </a:rPr>
-                        <a:t>2.6 × 2</a:t>
+                        <a:t>2,6 × 2</a:t>
                       </a:r>
                     </a:p>
                   </a:txBody>
@@ -10360,7 +10360,7 @@
                           <a:latin typeface="Arial" panose="020B0604020202020204" pitchFamily="34" charset="0"/>
                           <a:cs typeface="Arial" panose="020B0604020202020204" pitchFamily="34" charset="0"/>
                         </a:rPr>
-                        <a:t>2 × 1.6</a:t>
+                        <a:t>2 × 1,6</a:t>
                       </a:r>
                     </a:p>
                   </a:txBody>
@@ -10417,7 +10417,7 @@
                           <a:latin typeface="Arial" panose="020B0604020202020204" pitchFamily="34" charset="0"/>
                           <a:cs typeface="Arial" panose="020B0604020202020204" pitchFamily="34" charset="0"/>
                         </a:rPr>
-                        <a:t>1.7 × 3</a:t>
+                        <a:t>1,7 × 3</a:t>
                       </a:r>
                     </a:p>
                   </a:txBody>
@@ -21116,7 +21116,7 @@
                             <a:schemeClr val="tx1"/>
                           </a:solidFill>
                         </a:rPr>
-                        <a:t>8.06</a:t>
+                        <a:t>8,06</a:t>
                       </a:r>
                     </a:p>
                   </a:txBody>
@@ -21188,7 +21188,7 @@
                             <a:schemeClr val="tx1"/>
                           </a:solidFill>
                         </a:rPr>
-                        <a:t>10.88</a:t>
+                        <a:t>10,88</a:t>
                       </a:r>
                     </a:p>
                   </a:txBody>
@@ -21260,7 +21260,7 @@
                             <a:schemeClr val="tx1"/>
                           </a:solidFill>
                         </a:rPr>
-                        <a:t>5.46</a:t>
+                        <a:t>5,46</a:t>
                       </a:r>
                     </a:p>
                   </a:txBody>
@@ -21316,7 +21316,7 @@
                             <a:schemeClr val="tx1"/>
                           </a:solidFill>
                         </a:rPr>
-                        <a:t>11.96</a:t>
+                        <a:t>11,96</a:t>
                       </a:r>
                     </a:p>
                   </a:txBody>
@@ -21379,7 +21379,7 @@
                             <a:schemeClr val="tx1"/>
                           </a:solidFill>
                         </a:rPr>
-                        <a:t>11.22</a:t>
+                        <a:t>11,22</a:t>
                       </a:r>
                     </a:p>
                   </a:txBody>
@@ -21435,7 +21435,7 @@
                             <a:schemeClr val="tx1"/>
                           </a:solidFill>
                         </a:rPr>
-                        <a:t>2.52</a:t>
+                        <a:t>2,52</a:t>
                       </a:r>
                     </a:p>
                   </a:txBody>
@@ -21507,7 +21507,7 @@
                             <a:schemeClr val="tx1"/>
                           </a:solidFill>
                         </a:rPr>
-                        <a:t>10.08</a:t>
+                        <a:t>10,08</a:t>
                       </a:r>
                     </a:p>
                   </a:txBody>
@@ -21563,7 +21563,7 @@
                             <a:schemeClr val="tx1"/>
                           </a:solidFill>
                         </a:rPr>
-                        <a:t>0.42</a:t>
+                        <a:t>0,42</a:t>
                       </a:r>
                     </a:p>
                   </a:txBody>
@@ -21626,7 +21626,7 @@
                             <a:schemeClr val="tx1"/>
                           </a:solidFill>
                         </a:rPr>
-                        <a:t>4.96</a:t>
+                        <a:t>4,96</a:t>
                       </a:r>
                     </a:p>
                   </a:txBody>
@@ -21682,7 +21682,7 @@
                             <a:schemeClr val="tx1"/>
                           </a:solidFill>
                         </a:rPr>
-                        <a:t>7.48</a:t>
+                        <a:t>7,48</a:t>
                       </a:r>
                     </a:p>
                   </a:txBody>
@@ -21754,7 +21754,7 @@
                             <a:schemeClr val="tx1"/>
                           </a:solidFill>
                         </a:rPr>
-                        <a:t>2.03</a:t>
+                        <a:t>2,03</a:t>
                       </a:r>
                     </a:p>
                   </a:txBody>
@@ -21810,7 +21810,7 @@
                             <a:schemeClr val="tx1"/>
                           </a:solidFill>
                         </a:rPr>
-                        <a:t>6.88</a:t>
+                        <a:t>6,88</a:t>
                       </a:r>
                     </a:p>
                   </a:txBody>
@@ -21873,7 +21873,7 @@
                             <a:schemeClr val="tx1"/>
                           </a:solidFill>
                         </a:rPr>
-                        <a:t>2.97</a:t>
+                        <a:t>2,97</a:t>
                       </a:r>
                     </a:p>
                   </a:txBody>
@@ -21929,7 +21929,7 @@
                             <a:schemeClr val="tx1"/>
                           </a:solidFill>
                         </a:rPr>
-                        <a:t>11.75</a:t>
+                        <a:t>11,75</a:t>
                       </a:r>
                     </a:p>
                   </a:txBody>
@@ -22001,7 +22001,7 @@
                             <a:schemeClr val="tx1"/>
                           </a:solidFill>
                         </a:rPr>
-                        <a:t>2.87</a:t>
+                        <a:t>2,87</a:t>
                       </a:r>
                     </a:p>
                   </a:txBody>
@@ -22057,7 +22057,7 @@
                             <a:schemeClr val="tx1"/>
                           </a:solidFill>
                         </a:rPr>
-                        <a:t>16.32</a:t>
+                        <a:t>16,32</a:t>
                       </a:r>
                     </a:p>
                   </a:txBody>
@@ -22626,7 +22626,7 @@
                           <a:latin typeface="Arial" panose="020B0604020202020204" pitchFamily="34" charset="0"/>
                           <a:cs typeface="Arial" panose="020B0604020202020204" pitchFamily="34" charset="0"/>
                         </a:rPr>
-                        <a:t>3.4 × 2.2</a:t>
+                        <a:t>3,4 × 2,2</a:t>
                       </a:r>
                     </a:p>
                   </a:txBody>
@@ -22683,7 +22683,7 @@
                           <a:latin typeface="Arial" panose="020B0604020202020204" pitchFamily="34" charset="0"/>
                           <a:cs typeface="Arial" panose="020B0604020202020204" pitchFamily="34" charset="0"/>
                         </a:rPr>
-                        <a:t>5.1 × 3.2</a:t>
+                        <a:t>5,1 × 3,2</a:t>
                       </a:r>
                     </a:p>
                   </a:txBody>
@@ -22747,7 +22747,7 @@
                           <a:latin typeface="Arial" panose="020B0604020202020204" pitchFamily="34" charset="0"/>
                           <a:cs typeface="Arial" panose="020B0604020202020204" pitchFamily="34" charset="0"/>
                         </a:rPr>
-                        <a:t>5.2 × 2.3</a:t>
+                        <a:t>5,2 × 2,3</a:t>
                       </a:r>
                     </a:p>
                   </a:txBody>
@@ -22804,7 +22804,7 @@
                           <a:latin typeface="Arial" panose="020B0604020202020204" pitchFamily="34" charset="0"/>
                           <a:cs typeface="Arial" panose="020B0604020202020204" pitchFamily="34" charset="0"/>
                         </a:rPr>
-                        <a:t>3.3 × 0.9</a:t>
+                        <a:t>3,3 × 0,9</a:t>
                       </a:r>
                     </a:p>
                   </a:txBody>
@@ -22868,7 +22868,7 @@
                           <a:latin typeface="Arial" panose="020B0604020202020204" pitchFamily="34" charset="0"/>
                           <a:cs typeface="Arial" panose="020B0604020202020204" pitchFamily="34" charset="0"/>
                         </a:rPr>
-                        <a:t>2.6 × 3.1</a:t>
+                        <a:t>2,6 × 3,1</a:t>
                       </a:r>
                     </a:p>
                   </a:txBody>
@@ -22925,7 +22925,7 @@
                           <a:latin typeface="Arial" panose="020B0604020202020204" pitchFamily="34" charset="0"/>
                           <a:cs typeface="Arial" panose="020B0604020202020204" pitchFamily="34" charset="0"/>
                         </a:rPr>
-                        <a:t>3.6 × 2.8</a:t>
+                        <a:t>3,6 × 2,8</a:t>
                       </a:r>
                     </a:p>
                   </a:txBody>
@@ -22989,7 +22989,7 @@
                           <a:latin typeface="Arial" panose="020B0604020202020204" pitchFamily="34" charset="0"/>
                           <a:cs typeface="Arial" panose="020B0604020202020204" pitchFamily="34" charset="0"/>
                         </a:rPr>
-                        <a:t>1.4 × 1.8</a:t>
+                        <a:t>1,4 × 1,8</a:t>
                       </a:r>
                     </a:p>
                   </a:txBody>
@@ -23046,7 +23046,7 @@
                           <a:latin typeface="Arial" panose="020B0604020202020204" pitchFamily="34" charset="0"/>
                           <a:cs typeface="Arial" panose="020B0604020202020204" pitchFamily="34" charset="0"/>
                         </a:rPr>
-                        <a:t>2.2 × 5.1</a:t>
+                        <a:t>2,2 × 5,1</a:t>
                       </a:r>
                     </a:p>
                   </a:txBody>
@@ -23110,7 +23110,7 @@
                           <a:latin typeface="Arial" panose="020B0604020202020204" pitchFamily="34" charset="0"/>
                           <a:cs typeface="Arial" panose="020B0604020202020204" pitchFamily="34" charset="0"/>
                         </a:rPr>
-                        <a:t> 4.7 × 2.5</a:t>
+                        <a:t> 4,7 × 2,5</a:t>
                       </a:r>
                     </a:p>
                   </a:txBody>
@@ -23167,7 +23167,7 @@
                           <a:latin typeface="Arial" panose="020B0604020202020204" pitchFamily="34" charset="0"/>
                           <a:cs typeface="Arial" panose="020B0604020202020204" pitchFamily="34" charset="0"/>
                         </a:rPr>
-                        <a:t>1.3 × 4.2</a:t>
+                        <a:t>1,3 × 4,2</a:t>
                       </a:r>
                     </a:p>
                   </a:txBody>
@@ -23231,7 +23231,7 @@
                           <a:latin typeface="Arial" panose="020B0604020202020204" pitchFamily="34" charset="0"/>
                           <a:cs typeface="Arial" panose="020B0604020202020204" pitchFamily="34" charset="0"/>
                         </a:rPr>
-                        <a:t>0.7 × 2.9</a:t>
+                        <a:t>0,7 × 2,9</a:t>
                       </a:r>
                     </a:p>
                   </a:txBody>
@@ -23288,7 +23288,7 @@
                           <a:latin typeface="Arial" panose="020B0604020202020204" pitchFamily="34" charset="0"/>
                           <a:cs typeface="Arial" panose="020B0604020202020204" pitchFamily="34" charset="0"/>
                         </a:rPr>
-                        <a:t>1.6 × 4.3</a:t>
+                        <a:t>1,6 × 4,3</a:t>
                       </a:r>
                     </a:p>
                   </a:txBody>
@@ -23352,7 +23352,7 @@
                           <a:latin typeface="Arial" panose="020B0604020202020204" pitchFamily="34" charset="0"/>
                           <a:cs typeface="Arial" panose="020B0604020202020204" pitchFamily="34" charset="0"/>
                         </a:rPr>
-                        <a:t>4.1 × 0.7</a:t>
+                        <a:t>4,1 × 0,7</a:t>
                       </a:r>
                     </a:p>
                   </a:txBody>
@@ -23409,7 +23409,7 @@
                           <a:latin typeface="Arial" panose="020B0604020202020204" pitchFamily="34" charset="0"/>
                           <a:cs typeface="Arial" panose="020B0604020202020204" pitchFamily="34" charset="0"/>
                         </a:rPr>
-                        <a:t>3.1 × 1.6</a:t>
+                        <a:t>3,1 × 1,6</a:t>
                       </a:r>
                     </a:p>
                   </a:txBody>
@@ -23473,7 +23473,7 @@
                           <a:latin typeface="Arial" panose="020B0604020202020204" pitchFamily="34" charset="0"/>
                           <a:cs typeface="Arial" panose="020B0604020202020204" pitchFamily="34" charset="0"/>
                         </a:rPr>
-                        <a:t>3.4 × 3.2</a:t>
+                        <a:t>3,4 × 3,2</a:t>
                       </a:r>
                     </a:p>
                   </a:txBody>
@@ -23530,7 +23530,7 @@
                           <a:latin typeface="Arial" panose="020B0604020202020204" pitchFamily="34" charset="0"/>
                           <a:cs typeface="Arial" panose="020B0604020202020204" pitchFamily="34" charset="0"/>
                         </a:rPr>
-                        <a:t>0.6 × 0.7</a:t>
+                        <a:t>0,6 × 0,7</a:t>
                       </a:r>
                     </a:p>
                   </a:txBody>
